--- a/Lessons/Lesson B2-2 - String Manipulation.pptx
+++ b/Lessons/Lesson B2-2 - String Manipulation.pptx
@@ -17,9 +17,10 @@
     <p:sldId id="282" r:id="rId11"/>
     <p:sldId id="283" r:id="rId12"/>
     <p:sldId id="284" r:id="rId13"/>
-    <p:sldId id="285" r:id="rId14"/>
-    <p:sldId id="286" r:id="rId15"/>
-    <p:sldId id="276" r:id="rId16"/>
+    <p:sldId id="287" r:id="rId14"/>
+    <p:sldId id="285" r:id="rId15"/>
+    <p:sldId id="286" r:id="rId16"/>
+    <p:sldId id="276" r:id="rId17"/>
   </p:sldIdLst>
   <p:sldSz cx="12192000" cy="6858000"/>
   <p:notesSz cx="6858000" cy="9144000"/>
@@ -139,7 +140,7 @@
   <pc:docChgLst>
     <pc:chgData name="Michael Hill" userId="41dba03d-e58d-4389-9894-554c10310ba4" providerId="ADAL" clId="{9D59382A-03D6-4787-B5C4-E2E534A65D82}"/>
     <pc:docChg chg="undo custSel addSld delSld modSld">
-      <pc:chgData name="Michael Hill" userId="41dba03d-e58d-4389-9894-554c10310ba4" providerId="ADAL" clId="{9D59382A-03D6-4787-B5C4-E2E534A65D82}" dt="2025-08-14T18:09:33.773" v="3310"/>
+      <pc:chgData name="Michael Hill" userId="41dba03d-e58d-4389-9894-554c10310ba4" providerId="ADAL" clId="{9D59382A-03D6-4787-B5C4-E2E534A65D82}" dt="2025-08-15T15:35:56.682" v="3423" actId="20577"/>
       <pc:docMkLst>
         <pc:docMk/>
       </pc:docMkLst>
@@ -671,6 +672,29 @@
           </ac:spMkLst>
         </pc:spChg>
       </pc:sldChg>
+      <pc:sldChg chg="modSp add mod">
+        <pc:chgData name="Michael Hill" userId="41dba03d-e58d-4389-9894-554c10310ba4" providerId="ADAL" clId="{9D59382A-03D6-4787-B5C4-E2E534A65D82}" dt="2025-08-15T15:35:56.682" v="3423" actId="20577"/>
+        <pc:sldMkLst>
+          <pc:docMk/>
+          <pc:sldMk cId="909742858" sldId="287"/>
+        </pc:sldMkLst>
+        <pc:spChg chg="mod">
+          <ac:chgData name="Michael Hill" userId="41dba03d-e58d-4389-9894-554c10310ba4" providerId="ADAL" clId="{9D59382A-03D6-4787-B5C4-E2E534A65D82}" dt="2025-08-15T15:35:56.682" v="3423" actId="20577"/>
+          <ac:spMkLst>
+            <pc:docMk/>
+            <pc:sldMk cId="909742858" sldId="287"/>
+            <ac:spMk id="2" creationId="{2660CA8B-A321-000D-C196-E1E3B47012C2}"/>
+          </ac:spMkLst>
+        </pc:spChg>
+        <pc:spChg chg="mod">
+          <ac:chgData name="Michael Hill" userId="41dba03d-e58d-4389-9894-554c10310ba4" providerId="ADAL" clId="{9D59382A-03D6-4787-B5C4-E2E534A65D82}" dt="2025-08-15T15:35:48.490" v="3417" actId="20577"/>
+          <ac:spMkLst>
+            <pc:docMk/>
+            <pc:sldMk cId="909742858" sldId="287"/>
+            <ac:spMk id="8" creationId="{BF43161D-168E-FA4F-FD43-7F3FD4C7D723}"/>
+          </ac:spMkLst>
+        </pc:spChg>
+      </pc:sldChg>
     </pc:docChg>
   </pc:docChgLst>
 </pc:chgInfo>
@@ -823,7 +847,7 @@
           <a:p>
             <a:fld id="{52CFA067-BC5A-4095-A3A5-99A1BAFE9208}" type="datetimeFigureOut">
               <a:rPr lang="en-US" smtClean="0"/>
-              <a:t>8/14/2025</a:t>
+              <a:t>8/15/2025</a:t>
             </a:fld>
             <a:endParaRPr lang="en-US"/>
           </a:p>
@@ -1021,7 +1045,7 @@
           <a:p>
             <a:fld id="{52CFA067-BC5A-4095-A3A5-99A1BAFE9208}" type="datetimeFigureOut">
               <a:rPr lang="en-US" smtClean="0"/>
-              <a:t>8/14/2025</a:t>
+              <a:t>8/15/2025</a:t>
             </a:fld>
             <a:endParaRPr lang="en-US"/>
           </a:p>
@@ -1229,7 +1253,7 @@
           <a:p>
             <a:fld id="{52CFA067-BC5A-4095-A3A5-99A1BAFE9208}" type="datetimeFigureOut">
               <a:rPr lang="en-US" smtClean="0"/>
-              <a:t>8/14/2025</a:t>
+              <a:t>8/15/2025</a:t>
             </a:fld>
             <a:endParaRPr lang="en-US"/>
           </a:p>
@@ -1427,7 +1451,7 @@
           <a:p>
             <a:fld id="{52CFA067-BC5A-4095-A3A5-99A1BAFE9208}" type="datetimeFigureOut">
               <a:rPr lang="en-US" smtClean="0"/>
-              <a:t>8/14/2025</a:t>
+              <a:t>8/15/2025</a:t>
             </a:fld>
             <a:endParaRPr lang="en-US"/>
           </a:p>
@@ -1702,7 +1726,7 @@
           <a:p>
             <a:fld id="{52CFA067-BC5A-4095-A3A5-99A1BAFE9208}" type="datetimeFigureOut">
               <a:rPr lang="en-US" smtClean="0"/>
-              <a:t>8/14/2025</a:t>
+              <a:t>8/15/2025</a:t>
             </a:fld>
             <a:endParaRPr lang="en-US"/>
           </a:p>
@@ -1967,7 +1991,7 @@
           <a:p>
             <a:fld id="{52CFA067-BC5A-4095-A3A5-99A1BAFE9208}" type="datetimeFigureOut">
               <a:rPr lang="en-US" smtClean="0"/>
-              <a:t>8/14/2025</a:t>
+              <a:t>8/15/2025</a:t>
             </a:fld>
             <a:endParaRPr lang="en-US"/>
           </a:p>
@@ -2379,7 +2403,7 @@
           <a:p>
             <a:fld id="{52CFA067-BC5A-4095-A3A5-99A1BAFE9208}" type="datetimeFigureOut">
               <a:rPr lang="en-US" smtClean="0"/>
-              <a:t>8/14/2025</a:t>
+              <a:t>8/15/2025</a:t>
             </a:fld>
             <a:endParaRPr lang="en-US"/>
           </a:p>
@@ -2520,7 +2544,7 @@
           <a:p>
             <a:fld id="{52CFA067-BC5A-4095-A3A5-99A1BAFE9208}" type="datetimeFigureOut">
               <a:rPr lang="en-US" smtClean="0"/>
-              <a:t>8/14/2025</a:t>
+              <a:t>8/15/2025</a:t>
             </a:fld>
             <a:endParaRPr lang="en-US"/>
           </a:p>
@@ -2633,7 +2657,7 @@
           <a:p>
             <a:fld id="{52CFA067-BC5A-4095-A3A5-99A1BAFE9208}" type="datetimeFigureOut">
               <a:rPr lang="en-US" smtClean="0"/>
-              <a:t>8/14/2025</a:t>
+              <a:t>8/15/2025</a:t>
             </a:fld>
             <a:endParaRPr lang="en-US"/>
           </a:p>
@@ -2944,7 +2968,7 @@
           <a:p>
             <a:fld id="{52CFA067-BC5A-4095-A3A5-99A1BAFE9208}" type="datetimeFigureOut">
               <a:rPr lang="en-US" smtClean="0"/>
-              <a:t>8/14/2025</a:t>
+              <a:t>8/15/2025</a:t>
             </a:fld>
             <a:endParaRPr lang="en-US"/>
           </a:p>
@@ -3232,7 +3256,7 @@
           <a:p>
             <a:fld id="{52CFA067-BC5A-4095-A3A5-99A1BAFE9208}" type="datetimeFigureOut">
               <a:rPr lang="en-US" smtClean="0"/>
-              <a:t>8/14/2025</a:t>
+              <a:t>8/15/2025</a:t>
             </a:fld>
             <a:endParaRPr lang="en-US"/>
           </a:p>
@@ -3473,7 +3497,7 @@
           <a:p>
             <a:fld id="{52CFA067-BC5A-4095-A3A5-99A1BAFE9208}" type="datetimeFigureOut">
               <a:rPr lang="en-US" smtClean="0"/>
-              <a:t>8/14/2025</a:t>
+              <a:t>8/15/2025</a:t>
             </a:fld>
             <a:endParaRPr lang="en-US"/>
           </a:p>
@@ -6330,6 +6354,682 @@
         <p:cNvPr id="1" name="">
           <a:extLst>
             <a:ext uri="{FF2B5EF4-FFF2-40B4-BE49-F238E27FC236}">
+              <a16:creationId xmlns:a16="http://schemas.microsoft.com/office/drawing/2014/main" id="{64E2A02C-2869-39C7-D59C-3CD0318FA43C}"/>
+            </a:ext>
+          </a:extLst>
+        </p:cNvPr>
+        <p:cNvGrpSpPr/>
+        <p:nvPr/>
+      </p:nvGrpSpPr>
+      <p:grpSpPr>
+        <a:xfrm>
+          <a:off x="0" y="0"/>
+          <a:ext cx="0" cy="0"/>
+          <a:chOff x="0" y="0"/>
+          <a:chExt cx="0" cy="0"/>
+        </a:xfrm>
+      </p:grpSpPr>
+      <p:sp>
+        <p:nvSpPr>
+          <p:cNvPr id="12" name="Oval 11">
+            <a:extLst>
+              <a:ext uri="{FF2B5EF4-FFF2-40B4-BE49-F238E27FC236}">
+                <a16:creationId xmlns:a16="http://schemas.microsoft.com/office/drawing/2014/main" id="{5E73E8D8-DB8B-8E30-06C4-DC07F6F1BAC0}"/>
+              </a:ext>
+            </a:extLst>
+          </p:cNvPr>
+          <p:cNvSpPr/>
+          <p:nvPr/>
+        </p:nvSpPr>
+        <p:spPr>
+          <a:xfrm>
+            <a:off x="6199068" y="1783144"/>
+            <a:ext cx="1253064" cy="1253064"/>
+          </a:xfrm>
+          <a:prstGeom prst="ellipse">
+            <a:avLst/>
+          </a:prstGeom>
+          <a:noFill/>
+          <a:ln w="101600">
+            <a:solidFill>
+              <a:srgbClr val="274F3F"/>
+            </a:solidFill>
+            <a:prstDash val="sysDash"/>
+          </a:ln>
+          <a:effectLst>
+            <a:outerShdw blurRad="76200" dist="12700" dir="2700000" sy="-23000" kx="-800400" algn="bl" rotWithShape="0">
+              <a:prstClr val="black">
+                <a:alpha val="20000"/>
+              </a:prstClr>
+            </a:outerShdw>
+          </a:effectLst>
+        </p:spPr>
+        <p:style>
+          <a:lnRef idx="2">
+            <a:schemeClr val="accent1">
+              <a:shade val="15000"/>
+            </a:schemeClr>
+          </a:lnRef>
+          <a:fillRef idx="1">
+            <a:schemeClr val="accent1"/>
+          </a:fillRef>
+          <a:effectRef idx="0">
+            <a:schemeClr val="accent1"/>
+          </a:effectRef>
+          <a:fontRef idx="minor">
+            <a:schemeClr val="lt1"/>
+          </a:fontRef>
+        </p:style>
+        <p:txBody>
+          <a:bodyPr rtlCol="0" anchor="ctr"/>
+          <a:lstStyle/>
+          <a:p>
+            <a:pPr algn="ctr"/>
+            <a:endParaRPr lang="en-US"/>
+          </a:p>
+        </p:txBody>
+      </p:sp>
+      <p:sp>
+        <p:nvSpPr>
+          <p:cNvPr id="9" name="Oval 8">
+            <a:extLst>
+              <a:ext uri="{FF2B5EF4-FFF2-40B4-BE49-F238E27FC236}">
+                <a16:creationId xmlns:a16="http://schemas.microsoft.com/office/drawing/2014/main" id="{A3C041F8-93C3-DCB8-B282-F71B670E3994}"/>
+              </a:ext>
+            </a:extLst>
+          </p:cNvPr>
+          <p:cNvSpPr/>
+          <p:nvPr/>
+        </p:nvSpPr>
+        <p:spPr>
+          <a:xfrm>
+            <a:off x="255923" y="3717853"/>
+            <a:ext cx="2019444" cy="2019444"/>
+          </a:xfrm>
+          <a:prstGeom prst="ellipse">
+            <a:avLst/>
+          </a:prstGeom>
+          <a:noFill/>
+          <a:ln w="101600">
+            <a:solidFill>
+              <a:srgbClr val="274F3F"/>
+            </a:solidFill>
+            <a:prstDash val="sysDash"/>
+          </a:ln>
+          <a:effectLst>
+            <a:outerShdw blurRad="76200" dist="12700" dir="2700000" sy="-23000" kx="-800400" algn="bl" rotWithShape="0">
+              <a:prstClr val="black">
+                <a:alpha val="20000"/>
+              </a:prstClr>
+            </a:outerShdw>
+          </a:effectLst>
+        </p:spPr>
+        <p:style>
+          <a:lnRef idx="2">
+            <a:schemeClr val="accent1">
+              <a:shade val="15000"/>
+            </a:schemeClr>
+          </a:lnRef>
+          <a:fillRef idx="1">
+            <a:schemeClr val="accent1"/>
+          </a:fillRef>
+          <a:effectRef idx="0">
+            <a:schemeClr val="accent1"/>
+          </a:effectRef>
+          <a:fontRef idx="minor">
+            <a:schemeClr val="lt1"/>
+          </a:fontRef>
+        </p:style>
+        <p:txBody>
+          <a:bodyPr rtlCol="0" anchor="ctr"/>
+          <a:lstStyle/>
+          <a:p>
+            <a:pPr algn="ctr"/>
+            <a:endParaRPr lang="en-US"/>
+          </a:p>
+        </p:txBody>
+      </p:sp>
+      <p:sp>
+        <p:nvSpPr>
+          <p:cNvPr id="7" name="Oval 6">
+            <a:extLst>
+              <a:ext uri="{FF2B5EF4-FFF2-40B4-BE49-F238E27FC236}">
+                <a16:creationId xmlns:a16="http://schemas.microsoft.com/office/drawing/2014/main" id="{162A6762-9BF0-D697-00F0-C2C8DDC5EA9F}"/>
+              </a:ext>
+            </a:extLst>
+          </p:cNvPr>
+          <p:cNvSpPr/>
+          <p:nvPr/>
+        </p:nvSpPr>
+        <p:spPr>
+          <a:xfrm>
+            <a:off x="4101365" y="311889"/>
+            <a:ext cx="1253064" cy="1253064"/>
+          </a:xfrm>
+          <a:prstGeom prst="ellipse">
+            <a:avLst/>
+          </a:prstGeom>
+          <a:noFill/>
+          <a:ln w="101600">
+            <a:solidFill>
+              <a:srgbClr val="274F3F"/>
+            </a:solidFill>
+            <a:prstDash val="sysDash"/>
+          </a:ln>
+          <a:effectLst>
+            <a:outerShdw blurRad="76200" dist="12700" dir="2700000" sy="-23000" kx="-800400" algn="bl" rotWithShape="0">
+              <a:prstClr val="black">
+                <a:alpha val="20000"/>
+              </a:prstClr>
+            </a:outerShdw>
+          </a:effectLst>
+        </p:spPr>
+        <p:style>
+          <a:lnRef idx="2">
+            <a:schemeClr val="accent1">
+              <a:shade val="15000"/>
+            </a:schemeClr>
+          </a:lnRef>
+          <a:fillRef idx="1">
+            <a:schemeClr val="accent1"/>
+          </a:fillRef>
+          <a:effectRef idx="0">
+            <a:schemeClr val="accent1"/>
+          </a:effectRef>
+          <a:fontRef idx="minor">
+            <a:schemeClr val="lt1"/>
+          </a:fontRef>
+        </p:style>
+        <p:txBody>
+          <a:bodyPr rtlCol="0" anchor="ctr"/>
+          <a:lstStyle/>
+          <a:p>
+            <a:pPr algn="ctr"/>
+            <a:endParaRPr lang="en-US"/>
+          </a:p>
+        </p:txBody>
+      </p:sp>
+      <p:sp>
+        <p:nvSpPr>
+          <p:cNvPr id="8" name="Rectangle 7">
+            <a:extLst>
+              <a:ext uri="{FF2B5EF4-FFF2-40B4-BE49-F238E27FC236}">
+                <a16:creationId xmlns:a16="http://schemas.microsoft.com/office/drawing/2014/main" id="{BF43161D-168E-FA4F-FD43-7F3FD4C7D723}"/>
+              </a:ext>
+            </a:extLst>
+          </p:cNvPr>
+          <p:cNvSpPr/>
+          <p:nvPr/>
+        </p:nvSpPr>
+        <p:spPr>
+          <a:xfrm>
+            <a:off x="740184" y="1219940"/>
+            <a:ext cx="4685128" cy="5391671"/>
+          </a:xfrm>
+          <a:prstGeom prst="rect">
+            <a:avLst/>
+          </a:prstGeom>
+          <a:solidFill>
+            <a:srgbClr val="326648"/>
+          </a:solidFill>
+          <a:ln>
+            <a:noFill/>
+          </a:ln>
+          <a:effectLst>
+            <a:outerShdw blurRad="76200" dist="12700" dir="2700000" sy="-23000" kx="-800400" algn="bl" rotWithShape="0">
+              <a:prstClr val="black">
+                <a:alpha val="20000"/>
+              </a:prstClr>
+            </a:outerShdw>
+          </a:effectLst>
+          <a:scene3d>
+            <a:camera prst="perspectiveContrastingRightFacing">
+              <a:rot lat="74709" lon="21590731" rev="60000"/>
+            </a:camera>
+            <a:lightRig rig="threePt" dir="t"/>
+          </a:scene3d>
+        </p:spPr>
+        <p:style>
+          <a:lnRef idx="2">
+            <a:schemeClr val="accent1">
+              <a:shade val="15000"/>
+            </a:schemeClr>
+          </a:lnRef>
+          <a:fillRef idx="1">
+            <a:schemeClr val="accent1"/>
+          </a:fillRef>
+          <a:effectRef idx="0">
+            <a:schemeClr val="accent1"/>
+          </a:effectRef>
+          <a:fontRef idx="minor">
+            <a:schemeClr val="lt1"/>
+          </a:fontRef>
+        </p:style>
+        <p:txBody>
+          <a:bodyPr rtlCol="0" anchor="t"/>
+          <a:lstStyle/>
+          <a:p>
+            <a:pPr marL="457200" indent="-457200">
+              <a:spcBef>
+                <a:spcPts val="1200"/>
+              </a:spcBef>
+              <a:buFont typeface="Arial" panose="020B0604020202020204" pitchFamily="34" charset="0"/>
+              <a:buChar char="•"/>
+            </a:pPr>
+            <a:r>
+              <a:rPr lang="en-US" sz="2800" dirty="0">
+                <a:solidFill>
+                  <a:schemeClr val="bg1"/>
+                </a:solidFill>
+                <a:latin typeface="Bahnschrift" panose="020B0502040204020203" pitchFamily="34" charset="0"/>
+              </a:rPr>
+              <a:t>You can also get a single character of the string by using a single number in the brackets</a:t>
+            </a:r>
+          </a:p>
+        </p:txBody>
+      </p:sp>
+      <p:sp>
+        <p:nvSpPr>
+          <p:cNvPr id="5" name="Rectangle 4">
+            <a:extLst>
+              <a:ext uri="{FF2B5EF4-FFF2-40B4-BE49-F238E27FC236}">
+                <a16:creationId xmlns:a16="http://schemas.microsoft.com/office/drawing/2014/main" id="{9633B5AE-A0ED-29DA-AA7D-928852773ED5}"/>
+              </a:ext>
+            </a:extLst>
+          </p:cNvPr>
+          <p:cNvSpPr/>
+          <p:nvPr/>
+        </p:nvSpPr>
+        <p:spPr>
+          <a:xfrm>
+            <a:off x="1" y="63619"/>
+            <a:ext cx="4030481" cy="928577"/>
+          </a:xfrm>
+          <a:prstGeom prst="rect">
+            <a:avLst/>
+          </a:prstGeom>
+          <a:solidFill>
+            <a:srgbClr val="326648"/>
+          </a:solidFill>
+          <a:ln>
+            <a:noFill/>
+          </a:ln>
+          <a:effectLst>
+            <a:outerShdw blurRad="76200" dist="12700" dir="2700000" sy="-23000" kx="-800400" algn="bl" rotWithShape="0">
+              <a:prstClr val="black">
+                <a:alpha val="20000"/>
+              </a:prstClr>
+            </a:outerShdw>
+          </a:effectLst>
+          <a:scene3d>
+            <a:camera prst="perspectiveContrastingRightFacing">
+              <a:rot lat="20788650" lon="1192990" rev="21395644"/>
+            </a:camera>
+            <a:lightRig rig="threePt" dir="t"/>
+          </a:scene3d>
+        </p:spPr>
+        <p:style>
+          <a:lnRef idx="2">
+            <a:schemeClr val="accent1">
+              <a:shade val="15000"/>
+            </a:schemeClr>
+          </a:lnRef>
+          <a:fillRef idx="1">
+            <a:schemeClr val="accent1"/>
+          </a:fillRef>
+          <a:effectRef idx="0">
+            <a:schemeClr val="accent1"/>
+          </a:effectRef>
+          <a:fontRef idx="minor">
+            <a:schemeClr val="lt1"/>
+          </a:fontRef>
+        </p:style>
+        <p:txBody>
+          <a:bodyPr rtlCol="0" anchor="ctr"/>
+          <a:lstStyle/>
+          <a:p>
+            <a:pPr algn="ctr"/>
+            <a:r>
+              <a:rPr lang="en-US" sz="4800" dirty="0">
+                <a:latin typeface="Bahnschrift SemiBold" panose="020B0502040204020203" pitchFamily="34" charset="0"/>
+              </a:rPr>
+              <a:t>SUBSTRING</a:t>
+            </a:r>
+          </a:p>
+        </p:txBody>
+      </p:sp>
+      <p:sp>
+        <p:nvSpPr>
+          <p:cNvPr id="2" name="Rectangle 1">
+            <a:extLst>
+              <a:ext uri="{FF2B5EF4-FFF2-40B4-BE49-F238E27FC236}">
+                <a16:creationId xmlns:a16="http://schemas.microsoft.com/office/drawing/2014/main" id="{2660CA8B-A321-000D-C196-E1E3B47012C2}"/>
+              </a:ext>
+            </a:extLst>
+          </p:cNvPr>
+          <p:cNvSpPr/>
+          <p:nvPr/>
+        </p:nvSpPr>
+        <p:spPr>
+          <a:xfrm>
+            <a:off x="5801547" y="1673235"/>
+            <a:ext cx="6035484" cy="2593966"/>
+          </a:xfrm>
+          <a:prstGeom prst="rect">
+            <a:avLst/>
+          </a:prstGeom>
+          <a:solidFill>
+            <a:schemeClr val="tx1">
+              <a:lumMod val="85000"/>
+              <a:lumOff val="15000"/>
+            </a:schemeClr>
+          </a:solidFill>
+          <a:ln w="38100">
+            <a:solidFill>
+              <a:srgbClr val="326648"/>
+            </a:solidFill>
+          </a:ln>
+          <a:effectLst>
+            <a:outerShdw blurRad="76200" dist="12700" dir="2700000" sy="-23000" kx="-800400" algn="bl" rotWithShape="0">
+              <a:prstClr val="black">
+                <a:alpha val="20000"/>
+              </a:prstClr>
+            </a:outerShdw>
+          </a:effectLst>
+          <a:scene3d>
+            <a:camera prst="perspectiveContrastingRightFacing">
+              <a:rot lat="69195" lon="290748" rev="21540000"/>
+            </a:camera>
+            <a:lightRig rig="threePt" dir="t"/>
+          </a:scene3d>
+        </p:spPr>
+        <p:style>
+          <a:lnRef idx="2">
+            <a:schemeClr val="accent1">
+              <a:shade val="15000"/>
+            </a:schemeClr>
+          </a:lnRef>
+          <a:fillRef idx="1">
+            <a:schemeClr val="accent1"/>
+          </a:fillRef>
+          <a:effectRef idx="0">
+            <a:schemeClr val="accent1"/>
+          </a:effectRef>
+          <a:fontRef idx="minor">
+            <a:schemeClr val="lt1"/>
+          </a:fontRef>
+        </p:style>
+        <p:txBody>
+          <a:bodyPr rtlCol="0" anchor="t"/>
+          <a:lstStyle/>
+          <a:p>
+            <a:pPr lvl="0" eaLnBrk="0" fontAlgn="base" hangingPunct="0">
+              <a:spcBef>
+                <a:spcPct val="0"/>
+              </a:spcBef>
+              <a:spcAft>
+                <a:spcPct val="0"/>
+              </a:spcAft>
+            </a:pPr>
+            <a:r>
+              <a:rPr kumimoji="0" lang="en-US" altLang="en-US" sz="2800" b="0" i="0" u="none" strike="noStrike" cap="none" normalizeH="0" baseline="0" dirty="0">
+                <a:ln>
+                  <a:noFill/>
+                </a:ln>
+                <a:solidFill>
+                  <a:srgbClr val="A8AFBE"/>
+                </a:solidFill>
+                <a:effectLst/>
+                <a:latin typeface="Cascadia Mono" panose="020B0609020000020004" pitchFamily="49" charset="0"/>
+                <a:cs typeface="Cascadia Mono" panose="020B0609020000020004" pitchFamily="49" charset="0"/>
+              </a:rPr>
+              <a:t>word = </a:t>
+            </a:r>
+            <a:r>
+              <a:rPr kumimoji="0" lang="en-US" altLang="en-US" sz="2800" b="0" i="0" u="none" strike="noStrike" cap="none" normalizeH="0" baseline="0" dirty="0">
+                <a:ln>
+                  <a:noFill/>
+                </a:ln>
+                <a:solidFill>
+                  <a:srgbClr val="75AA5F"/>
+                </a:solidFill>
+                <a:effectLst/>
+                <a:latin typeface="Cascadia Mono" panose="020B0609020000020004" pitchFamily="49" charset="0"/>
+                <a:cs typeface="Cascadia Mono" panose="020B0609020000020004" pitchFamily="49" charset="0"/>
+              </a:rPr>
+              <a:t>"bazinga"</a:t>
+            </a:r>
+            <a:br>
+              <a:rPr kumimoji="0" lang="en-US" altLang="en-US" sz="2800" b="0" i="0" u="none" strike="noStrike" cap="none" normalizeH="0" baseline="0" dirty="0">
+                <a:ln>
+                  <a:noFill/>
+                </a:ln>
+                <a:solidFill>
+                  <a:srgbClr val="A8AFBE"/>
+                </a:solidFill>
+                <a:effectLst/>
+                <a:latin typeface="Cascadia Mono" panose="020B0609020000020004" pitchFamily="49" charset="0"/>
+                <a:cs typeface="Cascadia Mono" panose="020B0609020000020004" pitchFamily="49" charset="0"/>
+              </a:rPr>
+            </a:br>
+            <a:r>
+              <a:rPr kumimoji="0" lang="en-US" altLang="en-US" sz="2800" b="0" i="0" u="none" strike="noStrike" cap="none" normalizeH="0" baseline="0" dirty="0">
+                <a:ln>
+                  <a:noFill/>
+                </a:ln>
+                <a:solidFill>
+                  <a:srgbClr val="A8AFBE"/>
+                </a:solidFill>
+                <a:effectLst/>
+                <a:latin typeface="Cascadia Mono" panose="020B0609020000020004" pitchFamily="49" charset="0"/>
+                <a:cs typeface="Cascadia Mono" panose="020B0609020000020004" pitchFamily="49" charset="0"/>
+              </a:rPr>
+              <a:t>sub = word[</a:t>
+            </a:r>
+            <a:r>
+              <a:rPr kumimoji="0" lang="en-US" altLang="en-US" sz="2800" b="0" i="0" u="none" strike="noStrike" cap="none" normalizeH="0" baseline="0" dirty="0">
+                <a:ln>
+                  <a:noFill/>
+                </a:ln>
+                <a:solidFill>
+                  <a:srgbClr val="6897BB"/>
+                </a:solidFill>
+                <a:effectLst/>
+                <a:latin typeface="Cascadia Mono" panose="020B0609020000020004" pitchFamily="49" charset="0"/>
+                <a:cs typeface="Cascadia Mono" panose="020B0609020000020004" pitchFamily="49" charset="0"/>
+              </a:rPr>
+              <a:t>2</a:t>
+            </a:r>
+            <a:r>
+              <a:rPr kumimoji="0" lang="en-US" altLang="en-US" sz="2800" b="0" i="0" u="none" strike="noStrike" cap="none" normalizeH="0" baseline="0" dirty="0">
+                <a:ln>
+                  <a:noFill/>
+                </a:ln>
+                <a:solidFill>
+                  <a:srgbClr val="A8AFBE"/>
+                </a:solidFill>
+                <a:effectLst/>
+                <a:latin typeface="Cascadia Mono" panose="020B0609020000020004" pitchFamily="49" charset="0"/>
+                <a:cs typeface="Cascadia Mono" panose="020B0609020000020004" pitchFamily="49" charset="0"/>
+              </a:rPr>
+              <a:t>]</a:t>
+            </a:r>
+            <a:br>
+              <a:rPr kumimoji="0" lang="en-US" altLang="en-US" sz="2800" b="0" i="0" u="none" strike="noStrike" cap="none" normalizeH="0" baseline="0" dirty="0">
+                <a:ln>
+                  <a:noFill/>
+                </a:ln>
+                <a:solidFill>
+                  <a:srgbClr val="A8AFBE"/>
+                </a:solidFill>
+                <a:effectLst/>
+                <a:latin typeface="Cascadia Mono" panose="020B0609020000020004" pitchFamily="49" charset="0"/>
+                <a:cs typeface="Cascadia Mono" panose="020B0609020000020004" pitchFamily="49" charset="0"/>
+              </a:rPr>
+            </a:br>
+            <a:r>
+              <a:rPr kumimoji="0" lang="en-US" altLang="en-US" sz="2800" b="0" i="0" u="none" strike="noStrike" cap="none" normalizeH="0" baseline="0" dirty="0">
+                <a:ln>
+                  <a:noFill/>
+                </a:ln>
+                <a:solidFill>
+                  <a:srgbClr val="8888C6"/>
+                </a:solidFill>
+                <a:effectLst/>
+                <a:latin typeface="Cascadia Mono" panose="020B0609020000020004" pitchFamily="49" charset="0"/>
+                <a:cs typeface="Cascadia Mono" panose="020B0609020000020004" pitchFamily="49" charset="0"/>
+              </a:rPr>
+              <a:t>print</a:t>
+            </a:r>
+            <a:r>
+              <a:rPr kumimoji="0" lang="en-US" altLang="en-US" sz="2800" b="0" i="0" u="none" strike="noStrike" cap="none" normalizeH="0" baseline="0" dirty="0">
+                <a:ln>
+                  <a:noFill/>
+                </a:ln>
+                <a:solidFill>
+                  <a:srgbClr val="A8AFBE"/>
+                </a:solidFill>
+                <a:effectLst/>
+                <a:latin typeface="Cascadia Mono" panose="020B0609020000020004" pitchFamily="49" charset="0"/>
+                <a:cs typeface="Cascadia Mono" panose="020B0609020000020004" pitchFamily="49" charset="0"/>
+              </a:rPr>
+              <a:t>(sub)</a:t>
+            </a:r>
+            <a:br>
+              <a:rPr kumimoji="0" lang="en-US" altLang="en-US" sz="2800" b="0" i="0" u="none" strike="noStrike" cap="none" normalizeH="0" baseline="0" dirty="0">
+                <a:ln>
+                  <a:noFill/>
+                </a:ln>
+                <a:solidFill>
+                  <a:srgbClr val="A8AFBE"/>
+                </a:solidFill>
+                <a:effectLst/>
+                <a:latin typeface="Cascadia Mono" panose="020B0609020000020004" pitchFamily="49" charset="0"/>
+                <a:cs typeface="Cascadia Mono" panose="020B0609020000020004" pitchFamily="49" charset="0"/>
+              </a:rPr>
+            </a:br>
+            <a:r>
+              <a:rPr kumimoji="0" lang="en-US" altLang="en-US" sz="2800" b="0" i="0" u="none" strike="noStrike" cap="none" normalizeH="0" baseline="0" dirty="0">
+                <a:ln>
+                  <a:noFill/>
+                </a:ln>
+                <a:solidFill>
+                  <a:srgbClr val="A8AFBE"/>
+                </a:solidFill>
+                <a:effectLst/>
+                <a:latin typeface="Cascadia Mono" panose="020B0609020000020004" pitchFamily="49" charset="0"/>
+                <a:cs typeface="Cascadia Mono" panose="020B0609020000020004" pitchFamily="49" charset="0"/>
+              </a:rPr>
+              <a:t>sub = word[</a:t>
+            </a:r>
+            <a:r>
+              <a:rPr lang="en-US" altLang="en-US" sz="2800" dirty="0">
+                <a:solidFill>
+                  <a:srgbClr val="6897BB"/>
+                </a:solidFill>
+                <a:latin typeface="Cascadia Mono" panose="020B0609020000020004" pitchFamily="49" charset="0"/>
+                <a:cs typeface="Cascadia Mono" panose="020B0609020000020004" pitchFamily="49" charset="0"/>
+              </a:rPr>
+              <a:t>5</a:t>
+            </a:r>
+            <a:r>
+              <a:rPr kumimoji="0" lang="en-US" altLang="en-US" sz="2800" b="0" i="0" u="none" strike="noStrike" cap="none" normalizeH="0" baseline="0" dirty="0">
+                <a:ln>
+                  <a:noFill/>
+                </a:ln>
+                <a:solidFill>
+                  <a:srgbClr val="A8AFBE"/>
+                </a:solidFill>
+                <a:effectLst/>
+                <a:latin typeface="Cascadia Mono" panose="020B0609020000020004" pitchFamily="49" charset="0"/>
+                <a:cs typeface="Cascadia Mono" panose="020B0609020000020004" pitchFamily="49" charset="0"/>
+              </a:rPr>
+              <a:t>]</a:t>
+            </a:r>
+            <a:br>
+              <a:rPr kumimoji="0" lang="en-US" altLang="en-US" sz="2800" b="0" i="0" u="none" strike="noStrike" cap="none" normalizeH="0" baseline="0" dirty="0">
+                <a:ln>
+                  <a:noFill/>
+                </a:ln>
+                <a:solidFill>
+                  <a:srgbClr val="A8AFBE"/>
+                </a:solidFill>
+                <a:effectLst/>
+                <a:latin typeface="Cascadia Mono" panose="020B0609020000020004" pitchFamily="49" charset="0"/>
+                <a:cs typeface="Cascadia Mono" panose="020B0609020000020004" pitchFamily="49" charset="0"/>
+              </a:rPr>
+            </a:br>
+            <a:r>
+              <a:rPr kumimoji="0" lang="en-US" altLang="en-US" sz="2800" b="0" i="0" u="none" strike="noStrike" cap="none" normalizeH="0" baseline="0" dirty="0">
+                <a:ln>
+                  <a:noFill/>
+                </a:ln>
+                <a:solidFill>
+                  <a:srgbClr val="8888C6"/>
+                </a:solidFill>
+                <a:effectLst/>
+                <a:latin typeface="Cascadia Mono" panose="020B0609020000020004" pitchFamily="49" charset="0"/>
+                <a:cs typeface="Cascadia Mono" panose="020B0609020000020004" pitchFamily="49" charset="0"/>
+              </a:rPr>
+              <a:t>print</a:t>
+            </a:r>
+            <a:r>
+              <a:rPr kumimoji="0" lang="en-US" altLang="en-US" sz="2800" b="0" i="0" u="none" strike="noStrike" cap="none" normalizeH="0" baseline="0" dirty="0">
+                <a:ln>
+                  <a:noFill/>
+                </a:ln>
+                <a:solidFill>
+                  <a:srgbClr val="A8AFBE"/>
+                </a:solidFill>
+                <a:effectLst/>
+                <a:latin typeface="Cascadia Mono" panose="020B0609020000020004" pitchFamily="49" charset="0"/>
+                <a:cs typeface="Cascadia Mono" panose="020B0609020000020004" pitchFamily="49" charset="0"/>
+              </a:rPr>
+              <a:t>(sub)</a:t>
+            </a:r>
+            <a:endParaRPr kumimoji="0" lang="en-US" altLang="en-US" sz="6000" b="0" i="0" u="none" strike="noStrike" cap="none" normalizeH="0" baseline="0" dirty="0">
+              <a:ln>
+                <a:noFill/>
+              </a:ln>
+              <a:solidFill>
+                <a:schemeClr val="tx1"/>
+              </a:solidFill>
+              <a:effectLst/>
+              <a:latin typeface="Cascadia Mono" panose="020B0609020000020004" pitchFamily="49" charset="0"/>
+              <a:cs typeface="Cascadia Mono" panose="020B0609020000020004" pitchFamily="49" charset="0"/>
+            </a:endParaRPr>
+          </a:p>
+        </p:txBody>
+      </p:sp>
+    </p:spTree>
+    <p:extLst>
+      <p:ext uri="{BB962C8B-B14F-4D97-AF65-F5344CB8AC3E}">
+        <p14:creationId xmlns:p14="http://schemas.microsoft.com/office/powerpoint/2010/main" val="909742858"/>
+      </p:ext>
+    </p:extLst>
+  </p:cSld>
+  <p:clrMapOvr>
+    <a:masterClrMapping/>
+  </p:clrMapOvr>
+</p:sld>
+</file>
+
+<file path=ppt/slides/slide14.xml><?xml version="1.0" encoding="utf-8"?>
+<p:sld xmlns:a="http://schemas.openxmlformats.org/drawingml/2006/main" xmlns:r="http://schemas.openxmlformats.org/officeDocument/2006/relationships" xmlns:p="http://schemas.openxmlformats.org/presentationml/2006/main">
+  <p:cSld>
+    <p:bg>
+      <p:bgPr>
+        <a:solidFill>
+          <a:srgbClr val="326648"/>
+        </a:solidFill>
+        <a:effectLst/>
+      </p:bgPr>
+    </p:bg>
+    <p:spTree>
+      <p:nvGrpSpPr>
+        <p:cNvPr id="1" name="">
+          <a:extLst>
+            <a:ext uri="{FF2B5EF4-FFF2-40B4-BE49-F238E27FC236}">
               <a16:creationId xmlns:a16="http://schemas.microsoft.com/office/drawing/2014/main" id="{F00FE7EB-CEAE-490A-7D97-AF57A84CE9B5}"/>
             </a:ext>
           </a:extLst>
@@ -7104,7 +7804,7 @@
 </p:sld>
 </file>
 
-<file path=ppt/slides/slide14.xml><?xml version="1.0" encoding="utf-8"?>
+<file path=ppt/slides/slide15.xml><?xml version="1.0" encoding="utf-8"?>
 <p:sld xmlns:a="http://schemas.openxmlformats.org/drawingml/2006/main" xmlns:r="http://schemas.openxmlformats.org/officeDocument/2006/relationships" xmlns:p="http://schemas.openxmlformats.org/presentationml/2006/main">
   <p:cSld>
     <p:bg>
@@ -7769,7 +8469,7 @@
 </p:sld>
 </file>
 
-<file path=ppt/slides/slide15.xml><?xml version="1.0" encoding="utf-8"?>
+<file path=ppt/slides/slide16.xml><?xml version="1.0" encoding="utf-8"?>
 <p:sld xmlns:a="http://schemas.openxmlformats.org/drawingml/2006/main" xmlns:r="http://schemas.openxmlformats.org/officeDocument/2006/relationships" xmlns:p="http://schemas.openxmlformats.org/presentationml/2006/main">
   <p:cSld>
     <p:bg>
